--- a/가설검정_최종변수선정_다영.pptx
+++ b/가설검정_최종변수선정_다영.pptx
@@ -3235,6 +3235,30 @@
               <a:buChar char="•"/>
             </a:pPr>
             <a:r>
+              <a:rPr lang="en-US" sz="1400" dirty="0">
+                <a:solidFill>
+                  <a:srgbClr val="6B7280"/>
+                </a:solidFill>
+                <a:latin typeface="Malgun Gothic" pitchFamily="34" charset="0"/>
+                <a:ea typeface="Malgun Gothic" pitchFamily="34" charset="-122"/>
+                <a:cs typeface="Malgun Gothic" pitchFamily="34" charset="-120"/>
+              </a:rPr>
+              <a:t>H0: 상관계수 = 0(관련 없음) / H1: 상관계수 ≠ 0(관련 있음) — 방향은 탐색적 가정일 뿐이라 양측검정 사용</a:t>
+            </a:r>
+            <a:endParaRPr lang="en-US" sz="1700" dirty="0"/>
+          </a:p>
+          <a:p>
+            <a:pPr algn="l" marL="342900" indent="-342900">
+              <a:lnSpc>
+                <a:spcPct val="125000"/>
+              </a:lnSpc>
+              <a:spcAft>
+                <a:spcPts val="1200"/>
+              </a:spcAft>
+              <a:buSzPct val="100000"/>
+              <a:buChar char="•"/>
+            </a:pPr>
+            <a:r>
               <a:rPr lang="en-US" sz="1800" b="1" dirty="0">
                 <a:solidFill>
                   <a:srgbClr val="333333"/>
@@ -6896,7 +6920,7 @@
                           <a:ea typeface="Malgun Gothic" pitchFamily="34" charset="-122"/>
                           <a:cs typeface="Malgun Gothic" pitchFamily="34" charset="-120"/>
                         </a:rPr>
-                        <a:t>가설2 (연속형 vs 사기여부)</a:t>
+                        <a:t>가설2 (연속형 vs 사기여부, 단측)</a:t>
                       </a:r>
                       <a:endParaRPr lang="en-US" sz="1250" dirty="0">
                         <a:latin typeface="Malgun Gothic" charset="0"/>
@@ -7032,7 +7056,7 @@
                           <a:ea typeface="Malgun Gothic" pitchFamily="34" charset="-122"/>
                           <a:cs typeface="Malgun Gothic" pitchFamily="34" charset="-120"/>
                         </a:rPr>
-                        <a:t>정규성 기각(p≈0, 0에 치우친 분포) → Mann-Whitney U를 주 검정으로, Welch's t는 참고용</a:t>
+                        <a:t>정규성 기각(p≈0, 0에 치우친 분포) → Mann-Whitney U를 주 검정으로, Welch's t는 참고용. H0·H1이 여집합이 되도록 방향(단측)을 맞춤</a:t>
                       </a:r>
                       <a:endParaRPr lang="en-US" sz="1250" dirty="0">
                         <a:latin typeface="Malgun Gothic" charset="0"/>
@@ -7102,7 +7126,7 @@
                           <a:ea typeface="Malgun Gothic" pitchFamily="34" charset="-122"/>
                           <a:cs typeface="Malgun Gothic" pitchFamily="34" charset="-120"/>
                         </a:rPr>
-                        <a:t>가설3 - 업종 (범주형 vs 범주형)</a:t>
+                        <a:t>가설3(a) - 업종 (범주형 vs 범주형, 양측)</a:t>
                       </a:r>
                       <a:endParaRPr lang="en-US" sz="1250" dirty="0">
                         <a:latin typeface="Malgun Gothic" charset="0"/>
@@ -7238,7 +7262,7 @@
                           <a:ea typeface="Malgun Gothic" pitchFamily="34" charset="-122"/>
                           <a:cs typeface="Malgun Gothic" pitchFamily="34" charset="-120"/>
                         </a:rPr>
-                        <a:t>두 범주형 변수 사이의 관련성 확인 (정규성 검정 대상 아님)</a:t>
+                        <a:t>방향 없는 일반 관련성 검정이라 양측 (정규성 검정 대상 아님)</a:t>
                       </a:r>
                       <a:endParaRPr lang="en-US" sz="1250" dirty="0">
                         <a:latin typeface="Malgun Gothic" charset="0"/>
@@ -7308,7 +7332,7 @@
                           <a:ea typeface="Malgun Gothic" pitchFamily="34" charset="-122"/>
                           <a:cs typeface="Malgun Gothic" pitchFamily="34" charset="-120"/>
                         </a:rPr>
-                        <a:t>가설3 - 업종별 동적 사기율 (연속형)</a:t>
+                        <a:t>가설3(b) - 업종별 동적 사기율 (연속형, 단측)</a:t>
                       </a:r>
                       <a:endParaRPr lang="en-US" sz="1250" dirty="0">
                         <a:latin typeface="Malgun Gothic" charset="0"/>
@@ -7444,7 +7468,7 @@
                           <a:ea typeface="Malgun Gothic" pitchFamily="34" charset="-122"/>
                           <a:cs typeface="Malgun Gothic" pitchFamily="34" charset="-120"/>
                         </a:rPr>
-                        <a:t>정규성 기각(p≈0) → 비모수 검정인 Mann-Whitney U 사용</a:t>
+                        <a:t>정규성 기각(p≈0) → 비모수 검정인 Mann-Whitney U 사용, 가설2와 동일하게 단측</a:t>
                       </a:r>
                       <a:endParaRPr lang="en-US" sz="1250" dirty="0">
                         <a:latin typeface="Malgun Gothic" charset="0"/>
@@ -8088,7 +8112,7 @@
                 <a:ea typeface="Malgun Gothic" pitchFamily="34" charset="-122"/>
                 <a:cs typeface="Malgun Gothic" pitchFamily="34" charset="-120"/>
               </a:rPr>
-              <a:t>확인하고 싶은 것 (대립가설): 이 횟수가 많을수록 이상거래일 가능성이 높다</a:t>
+              <a:t>H1(대립가설): 사기거래 집단의 평균 횟수가 정상거래 집단의 평균보다 크다 (μ사기 &gt; μ정상)</a:t>
             </a:r>
             <a:endParaRPr lang="en-US" sz="1800" dirty="0"/>
           </a:p>
@@ -8112,7 +8136,31 @@
                 <a:ea typeface="Malgun Gothic" pitchFamily="34" charset="-122"/>
                 <a:cs typeface="Malgun Gothic" pitchFamily="34" charset="-120"/>
               </a:rPr>
-              <a:t>반대로 가정 (귀무가설): 이 횟수는 사기 여부와 관련이 없다</a:t>
+              <a:t>H0(귀무가설): 사기거래 집단의 평균 횟수는 정상거래 집단의 평균보다 작거나 같다 (μ사기 ≤ μ정상)</a:t>
+            </a:r>
+            <a:endParaRPr lang="en-US" sz="1800" dirty="0"/>
+          </a:p>
+          <a:p>
+            <a:pPr algn="l" lvl="1" marL="685800" indent="-342900">
+              <a:lnSpc>
+                <a:spcPct val="125000"/>
+              </a:lnSpc>
+              <a:spcAft>
+                <a:spcPts val="1200"/>
+              </a:spcAft>
+              <a:buSzPct val="100000"/>
+              <a:buChar char="•"/>
+            </a:pPr>
+            <a:r>
+              <a:rPr lang="en-US" sz="1300" dirty="0">
+                <a:solidFill>
+                  <a:srgbClr val="6B7280"/>
+                </a:solidFill>
+                <a:latin typeface="Malgun Gothic" pitchFamily="34" charset="0"/>
+                <a:ea typeface="Malgun Gothic" pitchFamily="34" charset="-122"/>
+                <a:cs typeface="Malgun Gothic" pitchFamily="34" charset="-120"/>
+              </a:rPr>
+              <a:t>H0·H1이 서로 여집합이 되도록 방향(단측)을 맞춰 정리함</a:t>
             </a:r>
             <a:endParaRPr lang="en-US" sz="1800" dirty="0"/>
           </a:p>
@@ -8310,7 +8358,7 @@
                 <a:ea typeface="Malgun Gothic" pitchFamily="34" charset="-122"/>
                 <a:cs typeface="Malgun Gothic" pitchFamily="34" charset="-120"/>
               </a:rPr>
-              <a:t>값이 한쪽에 몰려있는 분포라 Welch's t-검정(등분산 가정 없음) + Mann-Whitney U 검정 2가지로 교차 확인했고, 둘 다 같은 결론</a:t>
+              <a:t>값이 한쪽에 몰려있는 분포라 Welch's t-검정(등분산 가정 없음) + Mann-Whitney U 검정(둘 다 단측) 2가지로 교차 확인했고, 둘 다 같은 결론</a:t>
             </a:r>
             <a:endParaRPr lang="en-US" sz="1550" dirty="0"/>
           </a:p>
@@ -8860,7 +8908,7 @@
                 <a:ea typeface="Malgun Gothic" pitchFamily="34" charset="-122"/>
                 <a:cs typeface="Malgun Gothic" pitchFamily="34" charset="-120"/>
               </a:rPr>
-              <a:t>확인하고 싶은 것 (대립가설): 고정된 업종 정보보다, 이 값이 사기 여부와 더 관련 있다</a:t>
+              <a:t>(a) category(범주형) — 양측: H0 관련 없음(독립) / H1 관련 있음(독립 아님)</a:t>
             </a:r>
             <a:endParaRPr lang="en-US" sz="1800" dirty="0"/>
           </a:p>
@@ -8876,7 +8924,7 @@
               <a:buChar char="•"/>
             </a:pPr>
             <a:r>
-              <a:rPr lang="en-US" sz="1800" dirty="0">
+              <a:rPr lang="en-US" sz="1800" b="1" dirty="0">
                 <a:solidFill>
                   <a:srgbClr val="333333"/>
                 </a:solidFill>
@@ -8884,7 +8932,31 @@
                 <a:ea typeface="Malgun Gothic" pitchFamily="34" charset="-122"/>
                 <a:cs typeface="Malgun Gothic" pitchFamily="34" charset="-120"/>
               </a:rPr>
-              <a:t>반대로 가정 (귀무가설): 업종(또는 이 값)은 사기 여부와 관련이 없다</a:t>
+              <a:t>(b) category_recent_fraud_rate(연속형) — 단측: H1 μ사기 &gt; μ정상 / H0 μ사기 ≤ μ정상</a:t>
+            </a:r>
+            <a:endParaRPr lang="en-US" sz="1800" dirty="0"/>
+          </a:p>
+          <a:p>
+            <a:pPr algn="l" lvl="1" marL="685800" indent="-342900">
+              <a:lnSpc>
+                <a:spcPct val="125000"/>
+              </a:lnSpc>
+              <a:spcAft>
+                <a:spcPts val="1200"/>
+              </a:spcAft>
+              <a:buSzPct val="100000"/>
+              <a:buChar char="•"/>
+            </a:pPr>
+            <a:r>
+              <a:rPr lang="en-US" sz="1300" dirty="0">
+                <a:solidFill>
+                  <a:srgbClr val="6B7280"/>
+                </a:solidFill>
+                <a:latin typeface="Malgun Gothic" pitchFamily="34" charset="0"/>
+                <a:ea typeface="Malgun Gothic" pitchFamily="34" charset="-122"/>
+                <a:cs typeface="Malgun Gothic" pitchFamily="34" charset="-120"/>
+              </a:rPr>
+              <a:t>(a)는 방향 없는 일반 관련성 검정이라 양측, (b)는 '더 높다'는 방향이 있어 단측으로 나눔</a:t>
             </a:r>
             <a:endParaRPr lang="en-US" sz="1800" dirty="0"/>
           </a:p>
@@ -9058,7 +9130,7 @@
                 <a:ea typeface="Malgun Gothic" pitchFamily="34" charset="-122"/>
                 <a:cs typeface="Malgun Gothic" pitchFamily="34" charset="-120"/>
               </a:rPr>
-              <a:t>이 차이 → Mann-Whitney U 검정으로 확인, 역시 우연이 아님 (p≈0)</a:t>
+              <a:t>이 차이 → Mann-Whitney U 검정(단측)으로 확인, 역시 우연이 아님 (p≈0)</a:t>
             </a:r>
             <a:endParaRPr lang="en-US" sz="1550" dirty="0"/>
           </a:p>
